--- a/catalog/samples/scatter_annotated.pptx
+++ b/catalog/samples/scatter_annotated.pptx
@@ -2671,7 +2671,7 @@
           </a:p>
           <a:p>
             <a:r>
-              <a:t>  "template_sha256": "43d5e1d4683237f6b5dc4f3ec3fc3c36fe469caacd0f4812b9604c65dfd51687"</a:t>
+              <a:t>  "template_sha256": "d36e8ecde7c4c42eb6e198a5834dc957d8040b703dfd3616e458e7e73c1927af"</a:t>
             </a:r>
           </a:p>
           <a:p>
